--- a/dist/초3/과학/물질과지구/초3_과학_물질과지구_01_물체와물질_학생용.pptx
+++ b/dist/초3/과학/물질과지구/초3_과학_물질과지구_01_물체와물질_학생용.pptx
@@ -121,20 +121,20 @@
   <p:extLst>
     <p:ext uri="{521415D9-36F7-43E2-AB2F-B90AF26B5E84}">
       <p14:sectionLst xmlns:p14="http://schemas.microsoft.com/office/powerpoint/2010/main">
-        <p14:section name="도입" id="{787c0d91-a1a3-05ea-c8bf-1a95c2b76ed3}">
+        <p14:section name="도입" id="{dd8221af-ac47-8b73-d545-b4cb31af1098}">
           <p14:sldIdLst>
             <p14:sldId id="256"/>
             <p14:sldId id="257"/>
           </p14:sldIdLst>
         </p14:section>
-        <p14:section name="개념" id="{1d66232d-62fd-9a79-f50f-7039e079034b}">
+        <p14:section name="개념" id="{7f3d4fbc-ce3e-ce09-b594-59321250ec89}">
           <p14:sldIdLst>
             <p14:sldId id="258"/>
             <p14:sldId id="264"/>
             <p14:sldId id="265"/>
           </p14:sldIdLst>
         </p14:section>
-        <p14:section name="연습" id="{36f4f33d-9ca0-f780-81f6-8b5e321e8562}">
+        <p14:section name="연습" id="{95ad718f-10e7-4164-81bd-17b3e8fa36e2}">
           <p14:sldIdLst>
             <p14:sldId id="259"/>
             <p14:sldId id="260"/>
@@ -144,24 +144,24 @@
             <p14:sldId id="266"/>
           </p14:sldIdLst>
         </p14:section>
-        <p14:section name="개념" id="{147219c1-cd3f-39d5-20b8-97c9239320c6}">
+        <p14:section name="개념" id="{d2f1a2a1-00ea-0a73-6048-139f72bfca81}">
           <p14:sldIdLst/>
         </p14:section>
-        <p14:section name="연습" id="{7100fc67-e609-b67c-726b-5585377982c5}">
+        <p14:section name="연습" id="{1db3eb3d-55ad-ae23-6acf-acf26ea795fe}">
           <p14:sldIdLst/>
         </p14:section>
-        <p14:section name="확인" id="{643fcf75-1af9-b6dd-39a5-ed8869979dcc}">
+        <p14:section name="확인" id="{1828d766-cdba-381d-7721-1f282a86d1af}">
           <p14:sldIdLst>
             <p14:sldId id="267"/>
             <p14:sldId id="268"/>
           </p14:sldIdLst>
         </p14:section>
-        <p14:section name="정리" id="{4c0f57a6-018f-7f33-7719-f2d47b57063c}">
+        <p14:section name="정리" id="{e847b42f-345a-a017-9346-0bed4e5af468}">
           <p14:sldIdLst>
             <p14:sldId id="269"/>
           </p14:sldIdLst>
         </p14:section>
-        <p14:section name="보충" id="{a42975b5-451a-37e1-506b-58054f0a72fd}">
+        <p14:section name="보충" id="{2c01cac2-ffcc-f3c1-bf4f-fd1bb27b80a3}">
           <p14:sldIdLst>
             <p14:sldId id="270"/>
           </p14:sldIdLst>
